--- a/docs/deck/alpha-tunnel.pptx
+++ b/docs/deck/alpha-tunnel.pptx
@@ -3139,7 +3139,7 @@
                 <a:ea typeface="Calibri" pitchFamily="34" charset="-122"/>
                 <a:cs typeface="Calibri" pitchFamily="34" charset="-120"/>
               </a:rPr>
-              <a:t>166 tests pass</a:t>
+              <a:t>The suite is green</a:t>
             </a:r>
             <a:endParaRPr lang="en-US" sz="1600" dirty="0"/>
           </a:p>
@@ -3181,7 +3181,7 @@
                 <a:ea typeface="Calibri" pitchFamily="34" charset="-122"/>
                 <a:cs typeface="Calibri" pitchFamily="34" charset="-120"/>
               </a:rPr>
-              <a:t>No new dependencies. Node standard library only, as before.</a:t>
+              <a:t>Checked when this deck was built — it will not render against a failing one. No dependencies beyond the Node standard library.</a:t>
             </a:r>
             <a:endParaRPr lang="en-US" sz="1300" dirty="0"/>
           </a:p>
